--- a/docs/MaiMate_提案簡報.pptx
+++ b/docs/MaiMate_提案簡報.pptx
@@ -1251,7 +1251,7 @@
           <a:p>
             <a:r>
               <a:rPr lang="en-US" dirty="0"/>
-              <a:t>＜商業性 20%＞中間那張卡是給 MaiCoin 評審聽的：這產品跟你們既有哲學一致、而且只有你們做得出來。</a:t>
+              <a:t>＜商業性 20%＞評審是交易所的人——先講①手續費語言最直接（此資料集帳戶年 4,674 筆，流失一個平台年損上萬到數十萬手續費），再用③④展示想像空間。費率以 MAX 官網公告為準（約掛單 0.05%/吃單 0.15%）。「只有交易所做得出來」：行為數據只有交易所有，外部工具拿不到。</a:t>
             </a:r>
             <a:endParaRPr lang="en-US" dirty="0"/>
           </a:p>
@@ -7243,7 +7243,7 @@
                 <a:ea typeface="Microsoft JhengHei" pitchFamily="34" charset="-122"/>
                 <a:cs typeface="Microsoft JhengHei" pitchFamily="34" charset="-120"/>
               </a:rPr>
-              <a:t>這是只有交易所做得出來的產品</a:t>
+              <a:t>怎麼賺錢：四條收入線，第一條今天就在收</a:t>
             </a:r>
             <a:endParaRPr lang="en-US" sz="2900" dirty="0"/>
           </a:p>
@@ -7257,12 +7257,12 @@
         </p:nvSpPr>
         <p:spPr>
           <a:xfrm>
-            <a:off x="548640" y="1737360"/>
-            <a:ext cx="3474720" cy="3657600"/>
+            <a:off x="548640" y="1645920"/>
+            <a:ext cx="5440680" cy="1783080"/>
           </a:xfrm>
           <a:prstGeom prst="roundRect">
             <a:avLst>
-              <a:gd name="adj" fmla="val 2368"/>
+              <a:gd name="adj" fmla="val 4615"/>
             </a:avLst>
           </a:prstGeom>
           <a:solidFill>
@@ -7279,8 +7279,8 @@
         </p:nvSpPr>
         <p:spPr>
           <a:xfrm>
-            <a:off x="868680" y="2011680"/>
-            <a:ext cx="2834640" cy="457200"/>
+            <a:off x="822960" y="1783080"/>
+            <a:ext cx="3840480" cy="411480"/>
           </a:xfrm>
           <a:prstGeom prst="rect">
             <a:avLst/>
@@ -7296,7 +7296,7 @@
               <a:buNone/>
             </a:pPr>
             <a:r>
-              <a:rPr lang="en-US" sz="1800" b="1" dirty="0">
+              <a:rPr lang="en-US" sz="1600" b="1" dirty="0">
                 <a:solidFill>
                   <a:srgbClr val="16224D"/>
                 </a:solidFill>
@@ -7304,65 +7304,26 @@
                 <a:ea typeface="Microsoft JhengHei" pitchFamily="34" charset="-122"/>
                 <a:cs typeface="Microsoft JhengHei" pitchFamily="34" charset="-120"/>
               </a:rPr>
-              <a:t>給誰用</a:t>
-            </a:r>
-            <a:endParaRPr lang="en-US" sz="1800" dirty="0"/>
-          </a:p>
-        </p:txBody>
-      </p:sp>
-      <p:sp>
-        <p:nvSpPr>
-          <p:cNvPr id="5" name="Text 3"/>
-          <p:cNvSpPr/>
-          <p:nvPr/>
-        </p:nvSpPr>
-        <p:spPr>
-          <a:xfrm>
-            <a:off x="868680" y="2560320"/>
-            <a:ext cx="2880360" cy="2651760"/>
-          </a:xfrm>
-          <a:prstGeom prst="rect">
-            <a:avLst/>
-          </a:prstGeom>
-          <a:noFill/>
-          <a:ln/>
-        </p:spPr>
-        <p:txBody>
-          <a:bodyPr wrap="square" lIns="0" tIns="0" rIns="0" bIns="0" rtlCol="0" anchor="ctr"/>
-          <a:lstStyle/>
-          <a:p>
-            <a:pPr indent="0" marL="0">
-              <a:buNone/>
-            </a:pPr>
-            <a:r>
-              <a:rPr lang="en-US" sz="1250" dirty="0">
-                <a:solidFill>
-                  <a:srgbClr val="1F2937"/>
-                </a:solidFill>
-                <a:latin typeface="Microsoft JhengHei" pitchFamily="34" charset="0"/>
-                <a:ea typeface="Microsoft JhengHei" pitchFamily="34" charset="-122"/>
-                <a:cs typeface="Microsoft JhengHei" pitchFamily="34" charset="-120"/>
-              </a:rPr>
-              <a:t>MAX 活躍用戶裡的中階散戶：有交易量、繳過學費、還沒有自己的紀律系統——行為洞察對他們價值最大。</a:t>
-            </a:r>
-            <a:endParaRPr lang="en-US" sz="1250" dirty="0"/>
-          </a:p>
-        </p:txBody>
-      </p:sp>
-      <p:sp>
-        <p:nvSpPr>
-          <p:cNvPr id="6" name="Shape 4"/>
-          <p:cNvSpPr/>
-          <p:nvPr/>
-        </p:nvSpPr>
-        <p:spPr>
-          <a:xfrm>
-            <a:off x="4297680" y="1737360"/>
-            <a:ext cx="3474720" cy="3657600"/>
+              <a:t>① 手續費放大</a:t>
+            </a:r>
+            <a:endParaRPr lang="en-US" sz="1600" dirty="0"/>
+          </a:p>
+        </p:txBody>
+      </p:sp>
+      <p:sp>
+        <p:nvSpPr>
+          <p:cNvPr id="5" name="Shape 3"/>
+          <p:cNvSpPr/>
+          <p:nvPr/>
+        </p:nvSpPr>
+        <p:spPr>
+          <a:xfrm>
+            <a:off x="4754880" y="1810512"/>
+            <a:ext cx="1005840" cy="347472"/>
           </a:xfrm>
           <a:prstGeom prst="roundRect">
             <a:avLst>
-              <a:gd name="adj" fmla="val 2368"/>
+              <a:gd name="adj" fmla="val 50000"/>
             </a:avLst>
           </a:prstGeom>
           <a:solidFill>
@@ -7373,14 +7334,53 @@
       </p:sp>
       <p:sp>
         <p:nvSpPr>
+          <p:cNvPr id="6" name="Text 4"/>
+          <p:cNvSpPr/>
+          <p:nvPr/>
+        </p:nvSpPr>
+        <p:spPr>
+          <a:xfrm>
+            <a:off x="4754880" y="1810512"/>
+            <a:ext cx="1005840" cy="347472"/>
+          </a:xfrm>
+          <a:prstGeom prst="rect">
+            <a:avLst/>
+          </a:prstGeom>
+          <a:noFill/>
+          <a:ln/>
+        </p:spPr>
+        <p:txBody>
+          <a:bodyPr wrap="square" lIns="0" tIns="0" rIns="0" bIns="0" rtlCol="0" anchor="ctr"/>
+          <a:lstStyle/>
+          <a:p>
+            <a:pPr algn="ctr" indent="0" marL="0">
+              <a:buNone/>
+            </a:pPr>
+            <a:r>
+              <a:rPr lang="en-US" sz="1050" b="1" dirty="0">
+                <a:solidFill>
+                  <a:srgbClr val="FFFFFF"/>
+                </a:solidFill>
+                <a:latin typeface="Microsoft JhengHei" pitchFamily="34" charset="0"/>
+                <a:ea typeface="Microsoft JhengHei" pitchFamily="34" charset="-122"/>
+                <a:cs typeface="Microsoft JhengHei" pitchFamily="34" charset="-120"/>
+              </a:rPr>
+              <a:t>現在</a:t>
+            </a:r>
+            <a:endParaRPr lang="en-US" sz="1050" dirty="0"/>
+          </a:p>
+        </p:txBody>
+      </p:sp>
+      <p:sp>
+        <p:nvSpPr>
           <p:cNvPr id="7" name="Text 5"/>
           <p:cNvSpPr/>
           <p:nvPr/>
         </p:nvSpPr>
         <p:spPr>
           <a:xfrm>
-            <a:off x="4617720" y="2011680"/>
-            <a:ext cx="2834640" cy="457200"/>
+            <a:off x="822960" y="2212848"/>
+            <a:ext cx="4937760" cy="1143000"/>
           </a:xfrm>
           <a:prstGeom prst="rect">
             <a:avLst/>
@@ -7396,73 +7396,34 @@
               <a:buNone/>
             </a:pPr>
             <a:r>
-              <a:rPr lang="en-US" sz="1800" b="1" dirty="0">
-                <a:solidFill>
-                  <a:srgbClr val="E8A13A"/>
-                </a:solidFill>
-                <a:latin typeface="Microsoft JhengHei" pitchFamily="34" charset="0"/>
-                <a:ea typeface="Microsoft JhengHei" pitchFamily="34" charset="-122"/>
-                <a:cs typeface="Microsoft JhengHei" pitchFamily="34" charset="-120"/>
-              </a:rPr>
-              <a:t>為什麼是 MAX</a:t>
-            </a:r>
-            <a:endParaRPr lang="en-US" sz="1800" dirty="0"/>
-          </a:p>
-        </p:txBody>
-      </p:sp>
-      <p:sp>
-        <p:nvSpPr>
-          <p:cNvPr id="8" name="Text 6"/>
-          <p:cNvSpPr/>
-          <p:nvPr/>
-        </p:nvSpPr>
-        <p:spPr>
-          <a:xfrm>
-            <a:off x="4617720" y="2560320"/>
-            <a:ext cx="2880360" cy="2651760"/>
-          </a:xfrm>
-          <a:prstGeom prst="rect">
-            <a:avLst/>
-          </a:prstGeom>
-          <a:noFill/>
-          <a:ln/>
-        </p:spPr>
-        <p:txBody>
-          <a:bodyPr wrap="square" lIns="0" tIns="0" rIns="0" bIns="0" rtlCol="0" anchor="ctr"/>
-          <a:lstStyle/>
-          <a:p>
-            <a:pPr indent="0" marL="0">
-              <a:buNone/>
-            </a:pPr>
-            <a:r>
-              <a:rPr lang="en-US" sz="1250" dirty="0">
-                <a:solidFill>
-                  <a:srgbClr val="EAF0FB"/>
-                </a:solidFill>
-                <a:latin typeface="Microsoft JhengHei" pitchFamily="34" charset="0"/>
-                <a:ea typeface="Microsoft JhengHei" pitchFamily="34" charset="-122"/>
-                <a:cs typeface="Microsoft JhengHei" pitchFamily="34" charset="-120"/>
-              </a:rPr>
-              <a:t>行為數據只有交易所自己有，外部工具永遠拿不到。確認卡機制也延續了 MaiCoin「所有金額異動須明確授權」的產品哲學——這個產品長在 MAX 身上最自然。</a:t>
-            </a:r>
-            <a:endParaRPr lang="en-US" sz="1250" dirty="0"/>
-          </a:p>
-        </p:txBody>
-      </p:sp>
-      <p:sp>
-        <p:nvSpPr>
-          <p:cNvPr id="9" name="Shape 7"/>
-          <p:cNvSpPr/>
-          <p:nvPr/>
-        </p:nvSpPr>
-        <p:spPr>
-          <a:xfrm>
-            <a:off x="8046720" y="1737360"/>
-            <a:ext cx="3474720" cy="3657600"/>
+              <a:rPr lang="en-US" sz="1150" dirty="0">
+                <a:solidFill>
+                  <a:srgbClr val="1F2937"/>
+                </a:solidFill>
+                <a:latin typeface="Microsoft JhengHei" pitchFamily="34" charset="0"/>
+                <a:ea typeface="Microsoft JhengHei" pitchFamily="34" charset="-122"/>
+                <a:cs typeface="Microsoft JhengHei" pitchFamily="34" charset="-120"/>
+              </a:rPr>
+              <a:t>不敢交易的新手 → 陪跑出第一筆單；恐慌離場的用戶 LTV 歸零 → 攔住＝保住手續費年金；MaiCoin → MAX 升級導流。中階散戶月交易 NT$50 萬 ≈ 平台月收 NT$250–750/人。</a:t>
+            </a:r>
+            <a:endParaRPr lang="en-US" sz="1150" dirty="0"/>
+          </a:p>
+        </p:txBody>
+      </p:sp>
+      <p:sp>
+        <p:nvSpPr>
+          <p:cNvPr id="8" name="Shape 6"/>
+          <p:cNvSpPr/>
+          <p:nvPr/>
+        </p:nvSpPr>
+        <p:spPr>
+          <a:xfrm>
+            <a:off x="6217920" y="1645920"/>
+            <a:ext cx="5440680" cy="1783080"/>
           </a:xfrm>
           <a:prstGeom prst="roundRect">
             <a:avLst>
-              <a:gd name="adj" fmla="val 2368"/>
+              <a:gd name="adj" fmla="val 4615"/>
             </a:avLst>
           </a:prstGeom>
           <a:solidFill>
@@ -7473,14 +7434,14 @@
       </p:sp>
       <p:sp>
         <p:nvSpPr>
-          <p:cNvPr id="10" name="Text 8"/>
-          <p:cNvSpPr/>
-          <p:nvPr/>
-        </p:nvSpPr>
-        <p:spPr>
-          <a:xfrm>
-            <a:off x="8366760" y="2011680"/>
-            <a:ext cx="2834640" cy="457200"/>
+          <p:cNvPr id="9" name="Text 7"/>
+          <p:cNvSpPr/>
+          <p:nvPr/>
+        </p:nvSpPr>
+        <p:spPr>
+          <a:xfrm>
+            <a:off x="6492240" y="1783080"/>
+            <a:ext cx="3840480" cy="411480"/>
           </a:xfrm>
           <a:prstGeom prst="rect">
             <a:avLst/>
@@ -7496,19 +7457,41 @@
               <a:buNone/>
             </a:pPr>
             <a:r>
-              <a:rPr lang="en-US" sz="1800" b="1" dirty="0">
-                <a:solidFill>
-                  <a:srgbClr val="16224D"/>
-                </a:solidFill>
-                <a:latin typeface="Microsoft JhengHei" pitchFamily="34" charset="0"/>
-                <a:ea typeface="Microsoft JhengHei" pitchFamily="34" charset="-122"/>
-                <a:cs typeface="Microsoft JhengHei" pitchFamily="34" charset="-120"/>
-              </a:rPr>
-              <a:t>怎麼長大</a:t>
-            </a:r>
-            <a:endParaRPr lang="en-US" sz="1800" dirty="0"/>
-          </a:p>
-        </p:txBody>
+              <a:rPr lang="en-US" sz="1600" b="1" dirty="0">
+                <a:solidFill>
+                  <a:srgbClr val="1F9D66"/>
+                </a:solidFill>
+                <a:latin typeface="Microsoft JhengHei" pitchFamily="34" charset="0"/>
+                <a:ea typeface="Microsoft JhengHei" pitchFamily="34" charset="-122"/>
+                <a:cs typeface="Microsoft JhengHei" pitchFamily="34" charset="-120"/>
+              </a:rPr>
+              <a:t>② 冷靜期→定期定額</a:t>
+            </a:r>
+            <a:endParaRPr lang="en-US" sz="1600" dirty="0"/>
+          </a:p>
+        </p:txBody>
+      </p:sp>
+      <p:sp>
+        <p:nvSpPr>
+          <p:cNvPr id="10" name="Shape 8"/>
+          <p:cNvSpPr/>
+          <p:nvPr/>
+        </p:nvSpPr>
+        <p:spPr>
+          <a:xfrm>
+            <a:off x="10424160" y="1810512"/>
+            <a:ext cx="1005840" cy="347472"/>
+          </a:xfrm>
+          <a:prstGeom prst="roundRect">
+            <a:avLst>
+              <a:gd name="adj" fmla="val 50000"/>
+            </a:avLst>
+          </a:prstGeom>
+          <a:solidFill>
+            <a:srgbClr val="1F9D66"/>
+          </a:solidFill>
+          <a:ln/>
+        </p:spPr>
       </p:sp>
       <p:sp>
         <p:nvSpPr>
@@ -7518,8 +7501,8 @@
         </p:nvSpPr>
         <p:spPr>
           <a:xfrm>
-            <a:off x="8366760" y="2560320"/>
-            <a:ext cx="2880360" cy="2651760"/>
+            <a:off x="10424160" y="1810512"/>
+            <a:ext cx="1005840" cy="347472"/>
           </a:xfrm>
           <a:prstGeom prst="rect">
             <a:avLst/>
@@ -7531,11 +7514,50 @@
           <a:bodyPr wrap="square" lIns="0" tIns="0" rIns="0" bIns="0" rtlCol="0" anchor="ctr"/>
           <a:lstStyle/>
           <a:p>
+            <a:pPr algn="ctr" indent="0" marL="0">
+              <a:buNone/>
+            </a:pPr>
+            <a:r>
+              <a:rPr lang="en-US" sz="1050" b="1" dirty="0">
+                <a:solidFill>
+                  <a:srgbClr val="FFFFFF"/>
+                </a:solidFill>
+                <a:latin typeface="Microsoft JhengHei" pitchFamily="34" charset="0"/>
+                <a:ea typeface="Microsoft JhengHei" pitchFamily="34" charset="-122"/>
+                <a:cs typeface="Microsoft JhengHei" pitchFamily="34" charset="-120"/>
+              </a:rPr>
+              <a:t>現在</a:t>
+            </a:r>
+            <a:endParaRPr lang="en-US" sz="1050" dirty="0"/>
+          </a:p>
+        </p:txBody>
+      </p:sp>
+      <p:sp>
+        <p:nvSpPr>
+          <p:cNvPr id="12" name="Text 10"/>
+          <p:cNvSpPr/>
+          <p:nvPr/>
+        </p:nvSpPr>
+        <p:spPr>
+          <a:xfrm>
+            <a:off x="6492240" y="2212848"/>
+            <a:ext cx="4937760" cy="1143000"/>
+          </a:xfrm>
+          <a:prstGeom prst="rect">
+            <a:avLst/>
+          </a:prstGeom>
+          <a:noFill/>
+          <a:ln/>
+        </p:spPr>
+        <p:txBody>
+          <a:bodyPr wrap="square" lIns="0" tIns="0" rIns="0" bIns="0" rtlCol="0" anchor="ctr"/>
+          <a:lstStyle/>
+          <a:p>
             <a:pPr indent="0" marL="0">
               <a:buNone/>
             </a:pPr>
             <a:r>
-              <a:rPr lang="en-US" sz="1250" dirty="0">
+              <a:rPr lang="en-US" sz="1150" dirty="0">
                 <a:solidFill>
                   <a:srgbClr val="1F2937"/>
                 </a:solidFill>
@@ -7543,22 +7565,44 @@
                 <a:ea typeface="Microsoft JhengHei" pitchFamily="34" charset="-122"/>
                 <a:cs typeface="Microsoft JhengHei" pitchFamily="34" charset="-120"/>
               </a:rPr>
-              <a:t>先當 MAX App 的免費健檢功能養黏著；再推訂閱制進階分析；最後把行為 API 開放給量化用戶。</a:t>
-            </a:r>
-            <a:endParaRPr lang="en-US" sz="1250" dirty="0"/>
-          </a:p>
-        </p:txBody>
-      </p:sp>
-      <p:sp>
-        <p:nvSpPr>
-          <p:cNvPr id="12" name="Text 10"/>
-          <p:cNvSpPr/>
-          <p:nvPr/>
-        </p:nvSpPr>
-        <p:spPr>
-          <a:xfrm>
-            <a:off x="548640" y="5715000"/>
-            <a:ext cx="11091672" cy="457200"/>
+              <a:t>三方案的「暫停」不是不賺——導向既有 DCA 產品，衝動單變長期定投：穩定費流＋資產沉澱。一次性的手續費，變年金。</a:t>
+            </a:r>
+            <a:endParaRPr lang="en-US" sz="1150" dirty="0"/>
+          </a:p>
+        </p:txBody>
+      </p:sp>
+      <p:sp>
+        <p:nvSpPr>
+          <p:cNvPr id="13" name="Shape 11"/>
+          <p:cNvSpPr/>
+          <p:nvPr/>
+        </p:nvSpPr>
+        <p:spPr>
+          <a:xfrm>
+            <a:off x="548640" y="3611880"/>
+            <a:ext cx="5440680" cy="1783080"/>
+          </a:xfrm>
+          <a:prstGeom prst="roundRect">
+            <a:avLst>
+              <a:gd name="adj" fmla="val 4615"/>
+            </a:avLst>
+          </a:prstGeom>
+          <a:solidFill>
+            <a:srgbClr val="EAF0FB"/>
+          </a:solidFill>
+          <a:ln/>
+        </p:spPr>
+      </p:sp>
+      <p:sp>
+        <p:nvSpPr>
+          <p:cNvPr id="14" name="Text 12"/>
+          <p:cNvSpPr/>
+          <p:nvPr/>
+        </p:nvSpPr>
+        <p:spPr>
+          <a:xfrm>
+            <a:off x="822960" y="3749040"/>
+            <a:ext cx="3840480" cy="411480"/>
           </a:xfrm>
           <a:prstGeom prst="rect">
             <a:avLst/>
@@ -7574,15 +7618,351 @@
               <a:buNone/>
             </a:pPr>
             <a:r>
+              <a:rPr lang="en-US" sz="1600" b="1" dirty="0">
+                <a:solidFill>
+                  <a:srgbClr val="E8A13A"/>
+                </a:solidFill>
+                <a:latin typeface="Microsoft JhengHei" pitchFamily="34" charset="0"/>
+                <a:ea typeface="Microsoft JhengHei" pitchFamily="34" charset="-122"/>
+                <a:cs typeface="Microsoft JhengHei" pitchFamily="34" charset="-120"/>
+              </a:rPr>
+              <a:t>③ Premium 訂閱</a:t>
+            </a:r>
+            <a:endParaRPr lang="en-US" sz="1600" dirty="0"/>
+          </a:p>
+        </p:txBody>
+      </p:sp>
+      <p:sp>
+        <p:nvSpPr>
+          <p:cNvPr id="15" name="Shape 13"/>
+          <p:cNvSpPr/>
+          <p:nvPr/>
+        </p:nvSpPr>
+        <p:spPr>
+          <a:xfrm>
+            <a:off x="4754880" y="3776472"/>
+            <a:ext cx="1005840" cy="347472"/>
+          </a:xfrm>
+          <a:prstGeom prst="roundRect">
+            <a:avLst>
+              <a:gd name="adj" fmla="val 50000"/>
+            </a:avLst>
+          </a:prstGeom>
+          <a:solidFill>
+            <a:srgbClr val="E8A13A"/>
+          </a:solidFill>
+          <a:ln/>
+        </p:spPr>
+      </p:sp>
+      <p:sp>
+        <p:nvSpPr>
+          <p:cNvPr id="16" name="Text 14"/>
+          <p:cNvSpPr/>
+          <p:nvPr/>
+        </p:nvSpPr>
+        <p:spPr>
+          <a:xfrm>
+            <a:off x="4754880" y="3776472"/>
+            <a:ext cx="1005840" cy="347472"/>
+          </a:xfrm>
+          <a:prstGeom prst="rect">
+            <a:avLst/>
+          </a:prstGeom>
+          <a:noFill/>
+          <a:ln/>
+        </p:spPr>
+        <p:txBody>
+          <a:bodyPr wrap="square" lIns="0" tIns="0" rIns="0" bIns="0" rtlCol="0" anchor="ctr"/>
+          <a:lstStyle/>
+          <a:p>
+            <a:pPr algn="ctr" indent="0" marL="0">
+              <a:buNone/>
+            </a:pPr>
+            <a:r>
+              <a:rPr lang="en-US" sz="1050" b="1" dirty="0">
+                <a:solidFill>
+                  <a:srgbClr val="FFFFFF"/>
+                </a:solidFill>
+                <a:latin typeface="Microsoft JhengHei" pitchFamily="34" charset="0"/>
+                <a:ea typeface="Microsoft JhengHei" pitchFamily="34" charset="-122"/>
+                <a:cs typeface="Microsoft JhengHei" pitchFamily="34" charset="-120"/>
+              </a:rPr>
+              <a:t>第二曲線</a:t>
+            </a:r>
+            <a:endParaRPr lang="en-US" sz="1050" dirty="0"/>
+          </a:p>
+        </p:txBody>
+      </p:sp>
+      <p:sp>
+        <p:nvSpPr>
+          <p:cNvPr id="17" name="Text 15"/>
+          <p:cNvSpPr/>
+          <p:nvPr/>
+        </p:nvSpPr>
+        <p:spPr>
+          <a:xfrm>
+            <a:off x="822960" y="4178808"/>
+            <a:ext cx="4937760" cy="1143000"/>
+          </a:xfrm>
+          <a:prstGeom prst="rect">
+            <a:avLst/>
+          </a:prstGeom>
+          <a:noFill/>
+          <a:ln/>
+        </p:spPr>
+        <p:txBody>
+          <a:bodyPr wrap="square" lIns="0" tIns="0" rIns="0" bIns="0" rtlCol="0" anchor="ctr"/>
+          <a:lstStyle/>
+          <a:p>
+            <a:pPr indent="0" marL="0">
+              <a:buNone/>
+            </a:pPr>
+            <a:r>
+              <a:rPr lang="en-US" sz="1150" dirty="0">
+                <a:solidFill>
+                  <a:srgbClr val="1F2937"/>
+                </a:solidFill>
+                <a:latin typeface="Microsoft JhengHei" pitchFamily="34" charset="0"/>
+                <a:ea typeface="Microsoft JhengHei" pitchFamily="34" charset="-122"/>
+                <a:cs typeface="Microsoft JhengHei" pitchFamily="34" charset="-120"/>
+              </a:rPr>
+              <a:t>損益歸因、年度健檢、即時行為提醒。月費 NT$99–199；10 萬活躍用戶滲透 5% ≈ 月收 NT$50–100 萬。</a:t>
+            </a:r>
+            <a:endParaRPr lang="en-US" sz="1150" dirty="0"/>
+          </a:p>
+        </p:txBody>
+      </p:sp>
+      <p:sp>
+        <p:nvSpPr>
+          <p:cNvPr id="18" name="Shape 16"/>
+          <p:cNvSpPr/>
+          <p:nvPr/>
+        </p:nvSpPr>
+        <p:spPr>
+          <a:xfrm>
+            <a:off x="6217920" y="3611880"/>
+            <a:ext cx="5440680" cy="1783080"/>
+          </a:xfrm>
+          <a:prstGeom prst="roundRect">
+            <a:avLst>
+              <a:gd name="adj" fmla="val 4615"/>
+            </a:avLst>
+          </a:prstGeom>
+          <a:solidFill>
+            <a:srgbClr val="EAF0FB"/>
+          </a:solidFill>
+          <a:ln/>
+        </p:spPr>
+      </p:sp>
+      <p:sp>
+        <p:nvSpPr>
+          <p:cNvPr id="19" name="Text 17"/>
+          <p:cNvSpPr/>
+          <p:nvPr/>
+        </p:nvSpPr>
+        <p:spPr>
+          <a:xfrm>
+            <a:off x="6492240" y="3749040"/>
+            <a:ext cx="3840480" cy="411480"/>
+          </a:xfrm>
+          <a:prstGeom prst="rect">
+            <a:avLst/>
+          </a:prstGeom>
+          <a:noFill/>
+          <a:ln/>
+        </p:spPr>
+        <p:txBody>
+          <a:bodyPr wrap="square" lIns="0" tIns="0" rIns="0" bIns="0" rtlCol="0" anchor="ctr"/>
+          <a:lstStyle/>
+          <a:p>
+            <a:pPr indent="0" marL="0">
+              <a:buNone/>
+            </a:pPr>
+            <a:r>
+              <a:rPr lang="en-US" sz="1600" b="1" dirty="0">
+                <a:solidFill>
+                  <a:srgbClr val="D64550"/>
+                </a:solidFill>
+                <a:latin typeface="Microsoft JhengHei" pitchFamily="34" charset="0"/>
+                <a:ea typeface="Microsoft JhengHei" pitchFamily="34" charset="-122"/>
+                <a:cs typeface="Microsoft JhengHei" pitchFamily="34" charset="-120"/>
+              </a:rPr>
+              <a:t>④ B2B 白牌</a:t>
+            </a:r>
+            <a:endParaRPr lang="en-US" sz="1600" dirty="0"/>
+          </a:p>
+        </p:txBody>
+      </p:sp>
+      <p:sp>
+        <p:nvSpPr>
+          <p:cNvPr id="20" name="Shape 18"/>
+          <p:cNvSpPr/>
+          <p:nvPr/>
+        </p:nvSpPr>
+        <p:spPr>
+          <a:xfrm>
+            <a:off x="10424160" y="3776472"/>
+            <a:ext cx="1005840" cy="347472"/>
+          </a:xfrm>
+          <a:prstGeom prst="roundRect">
+            <a:avLst>
+              <a:gd name="adj" fmla="val 50000"/>
+            </a:avLst>
+          </a:prstGeom>
+          <a:solidFill>
+            <a:srgbClr val="D64550"/>
+          </a:solidFill>
+          <a:ln/>
+        </p:spPr>
+      </p:sp>
+      <p:sp>
+        <p:nvSpPr>
+          <p:cNvPr id="21" name="Text 19"/>
+          <p:cNvSpPr/>
+          <p:nvPr/>
+        </p:nvSpPr>
+        <p:spPr>
+          <a:xfrm>
+            <a:off x="10424160" y="3776472"/>
+            <a:ext cx="1005840" cy="347472"/>
+          </a:xfrm>
+          <a:prstGeom prst="rect">
+            <a:avLst/>
+          </a:prstGeom>
+          <a:noFill/>
+          <a:ln/>
+        </p:spPr>
+        <p:txBody>
+          <a:bodyPr wrap="square" lIns="0" tIns="0" rIns="0" bIns="0" rtlCol="0" anchor="ctr"/>
+          <a:lstStyle/>
+          <a:p>
+            <a:pPr algn="ctr" indent="0" marL="0">
+              <a:buNone/>
+            </a:pPr>
+            <a:r>
+              <a:rPr lang="en-US" sz="1050" b="1" dirty="0">
+                <a:solidFill>
+                  <a:srgbClr val="FFFFFF"/>
+                </a:solidFill>
+                <a:latin typeface="Microsoft JhengHei" pitchFamily="34" charset="0"/>
+                <a:ea typeface="Microsoft JhengHei" pitchFamily="34" charset="-122"/>
+                <a:cs typeface="Microsoft JhengHei" pitchFamily="34" charset="-120"/>
+              </a:rPr>
+              <a:t>第三曲線</a:t>
+            </a:r>
+            <a:endParaRPr lang="en-US" sz="1050" dirty="0"/>
+          </a:p>
+        </p:txBody>
+      </p:sp>
+      <p:sp>
+        <p:nvSpPr>
+          <p:cNvPr id="22" name="Text 20"/>
+          <p:cNvSpPr/>
+          <p:nvPr/>
+        </p:nvSpPr>
+        <p:spPr>
+          <a:xfrm>
+            <a:off x="6492240" y="4178808"/>
+            <a:ext cx="4937760" cy="1143000"/>
+          </a:xfrm>
+          <a:prstGeom prst="rect">
+            <a:avLst/>
+          </a:prstGeom>
+          <a:noFill/>
+          <a:ln/>
+        </p:spPr>
+        <p:txBody>
+          <a:bodyPr wrap="square" lIns="0" tIns="0" rIns="0" bIns="0" rtlCol="0" anchor="ctr"/>
+          <a:lstStyle/>
+          <a:p>
+            <a:pPr indent="0" marL="0">
+              <a:buNone/>
+            </a:pPr>
+            <a:r>
+              <a:rPr lang="en-US" sz="1150" dirty="0">
+                <a:solidFill>
+                  <a:srgbClr val="1F2937"/>
+                </a:solidFill>
+                <a:latin typeface="Microsoft JhengHei" pitchFamily="34" charset="0"/>
+                <a:ea typeface="Microsoft JhengHei" pitchFamily="34" charset="-122"/>
+                <a:cs typeface="Microsoft JhengHei" pitchFamily="34" charset="-120"/>
+              </a:rPr>
+              <a:t>行為引擎＋合規 Agent 框架授權其他交易所／銀行財管。VASP 專法上路後，合規 AI 是剛需。</a:t>
+            </a:r>
+            <a:endParaRPr lang="en-US" sz="1150" dirty="0"/>
+          </a:p>
+        </p:txBody>
+      </p:sp>
+      <p:sp>
+        <p:nvSpPr>
+          <p:cNvPr id="23" name="Shape 21"/>
+          <p:cNvSpPr/>
+          <p:nvPr/>
+        </p:nvSpPr>
+        <p:spPr>
+          <a:xfrm>
+            <a:off x="548640" y="5623560"/>
+            <a:ext cx="11091672" cy="868680"/>
+          </a:xfrm>
+          <a:prstGeom prst="roundRect">
+            <a:avLst>
+              <a:gd name="adj" fmla="val 9474"/>
+            </a:avLst>
+          </a:prstGeom>
+          <a:solidFill>
+            <a:srgbClr val="16224D"/>
+          </a:solidFill>
+          <a:ln/>
+        </p:spPr>
+      </p:sp>
+      <p:sp>
+        <p:nvSpPr>
+          <p:cNvPr id="24" name="Text 22"/>
+          <p:cNvSpPr/>
+          <p:nvPr/>
+        </p:nvSpPr>
+        <p:spPr>
+          <a:xfrm>
+            <a:off x="868680" y="5760720"/>
+            <a:ext cx="10451592" cy="640080"/>
+          </a:xfrm>
+          <a:prstGeom prst="rect">
+            <a:avLst/>
+          </a:prstGeom>
+          <a:noFill/>
+          <a:ln/>
+        </p:spPr>
+        <p:txBody>
+          <a:bodyPr wrap="square" lIns="0" tIns="0" rIns="0" bIns="0" rtlCol="0" anchor="ctr"/>
+          <a:lstStyle/>
+          <a:p>
+            <a:pPr indent="0" marL="0">
+              <a:buNone/>
+            </a:pPr>
+            <a:r>
               <a:rPr lang="en-US" sz="1400" b="1" dirty="0">
                 <a:solidFill>
-                  <a:srgbClr val="16224D"/>
-                </a:solidFill>
-                <a:latin typeface="Microsoft JhengHei" pitchFamily="34" charset="0"/>
-                <a:ea typeface="Microsoft JhengHei" pitchFamily="34" charset="-122"/>
-                <a:cs typeface="Microsoft JhengHei" pitchFamily="34" charset="-120"/>
-              </a:rPr>
-              <a:t>投資人不缺數據——缺的是「關於自己的數據」。</a:t>
+                  <a:srgbClr val="E8A13A"/>
+                </a:solidFill>
+                <a:latin typeface="Microsoft JhengHei" pitchFamily="34" charset="0"/>
+                <a:ea typeface="Microsoft JhengHei" pitchFamily="34" charset="-122"/>
+                <a:cs typeface="Microsoft JhengHei" pitchFamily="34" charset="-120"/>
+              </a:rPr>
+              <a:t>單位經濟學：</a:t>
+            </a:r>
+            <a:pPr indent="0" marL="0">
+              <a:buNone/>
+            </a:pPr>
+            <a:r>
+              <a:rPr lang="en-US" sz="1400" dirty="0">
+                <a:solidFill>
+                  <a:srgbClr val="FFFFFF"/>
+                </a:solidFill>
+                <a:latin typeface="Microsoft JhengHei" pitchFamily="34" charset="0"/>
+                <a:ea typeface="Microsoft JhengHei" pitchFamily="34" charset="-122"/>
+                <a:cs typeface="Microsoft JhengHei" pitchFamily="34" charset="-120"/>
+              </a:rPr>
+              <a:t>AI 成本 &lt;NT$60/月/重度用戶；月交易額 NT$4 萬手續費就回本。留存每 +1%，手續費增量遠大於整個 AI 帳單。</a:t>
             </a:r>
             <a:endParaRPr lang="en-US" sz="1400" dirty="0"/>
           </a:p>

--- a/docs/MaiMate_提案簡報.pptx
+++ b/docs/MaiMate_提案簡報.pptx
@@ -1251,7 +1251,7 @@
           <a:p>
             <a:r>
               <a:rPr lang="en-US" dirty="0"/>
-              <a:t>＜商業性 20%＞評審是交易所的人——先講①手續費語言最直接（此資料集帳戶年 4,674 筆，流失一個平台年損上萬到數十萬手續費），再用③④展示想像空間。費率以 MAX 官網公告為準（約掛單 0.05%/吃單 0.15%）。「只有交易所做得出來」：行為數據只有交易所有，外部工具拿不到。</a:t>
+              <a:t>＜商業性 20%＞評審是交易所的人——先講①手續費語言最直接（此資料集帳戶年 4,674 筆，流失一個平台年損上萬到數十萬手續費），再用③④展示想像空間。費率已查證：基礎掛單 0.08%/吃單 0.16%，MAX Token 折抵 -30%（以官網現時公告為準）。「只有交易所做得出來」：行為數據只有交易所有，外部工具拿不到。</a:t>
             </a:r>
             <a:endParaRPr lang="en-US" dirty="0"/>
           </a:p>
